--- a/docs/craic/2026-05-23/稷韧云图_CRAIC答辩_v1.pptx
+++ b/docs/craic/2026-05-23/稷韧云图_CRAIC答辩_v1.pptx
@@ -4165,7 +4165,7 @@
                 <a:cs typeface="Microsoft YaHei"/>
                 <a:ascii typeface="Arial"/>
               </a:rPr>
-              <a:t>双引擎协同验证机制</a:t>
+              <a:t>双引擎互补归因机制</a:t>
             </a:r>
           </a:p>
         </p:txBody>
@@ -4251,7 +4251,7 @@
                 <a:cs typeface="Microsoft YaHei"/>
                 <a:ascii typeface="Arial"/>
               </a:rPr>
-              <a:t>两个原理完全不同的模型 → 独立建模 → 交叉印证 → 结论稳健</a:t>
+              <a:t>两个原理完全不同的模型 → 独立建模 → 双视角互补 → 决策更全面</a:t>
             </a:r>
           </a:p>
         </p:txBody>
@@ -4877,7 +4877,7 @@
                 <a:cs typeface="Microsoft YaHei"/>
                 <a:ascii typeface="Arial"/>
               </a:rPr>
-              <a:t>交叉印证</a:t>
+              <a:t>双视角互补</a:t>
             </a:r>
           </a:p>
         </p:txBody>
@@ -4919,7 +4919,7 @@
                 <a:cs typeface="Microsoft YaHei"/>
                 <a:ascii typeface="Arial"/>
               </a:rPr>
-              <a:t>稳健归因</a:t>
+              <a:t>互补归因</a:t>
             </a:r>
           </a:p>
         </p:txBody>
@@ -4961,7 +4961,7 @@
                 <a:cs typeface="Arial"/>
                 <a:ascii typeface="Arial"/>
               </a:rPr>
-              <a:t>Top-K 因子</a:t>
+              <a:t>Top-3 overlap 1/3</a:t>
             </a:r>
           </a:p>
           <a:p>
@@ -4980,7 +4980,7 @@
                 <a:cs typeface="Arial"/>
                 <a:ascii typeface="Arial"/>
               </a:rPr>
-              <a:t>Robust to</a:t>
+              <a:t>ρ ≈ 0</a:t>
             </a:r>
           </a:p>
           <a:p>
@@ -4999,7 +4999,7 @@
                 <a:cs typeface="Arial"/>
                 <a:ascii typeface="Arial"/>
               </a:rPr>
-              <a:t>model choice</a:t>
+              <a:t>near-independent</a:t>
             </a:r>
           </a:p>
         </p:txBody>
@@ -5127,7 +5127,7 @@
                 <a:cs typeface="Microsoft YaHei"/>
                 <a:ascii typeface="Arial"/>
               </a:rPr>
-              <a:t>两个完全不同原理的模型相互印证 → 既看「数据生长状态」也看「灾害政策响应」</a:t>
+              <a:t>两个完全不同原理的模型各自独立归因 → 既看「数据生长状态」也看「灾害政策响应」</a:t>
             </a:r>
           </a:p>
           <a:p>
@@ -5146,7 +5146,7 @@
                 <a:cs typeface="Microsoft YaHei"/>
                 <a:ascii typeface="Arial"/>
               </a:rPr>
-              <a:t>→ 「互补而非简单一致」,决策视角更全面、结论更稳健</a:t>
+              <a:t>→ 「互补而非简单一致」(Top-3 仅 1/3 重合, ρ≈0),决策视角更全面</a:t>
             </a:r>
           </a:p>
         </p:txBody>
@@ -12409,7 +12409,7 @@
                 <a:cs typeface="Microsoft YaHei"/>
                 <a:ascii typeface="Arial"/>
               </a:rPr>
-              <a:t>注意力增强的 XGBoost-SHAP × LSTM 双引擎协同验证</a:t>
+              <a:t>注意力增强的 XGBoost-SHAP × LSTM 双引擎互补归因</a:t>
             </a:r>
           </a:p>
         </p:txBody>
@@ -16740,7 +16740,7 @@
                 <a:cs typeface="Microsoft YaHei"/>
                 <a:ascii typeface="Arial"/>
               </a:rPr>
-              <a:t>建立 XGBoost-SHAP × Attention-LSTM 双引擎协同验证 + SHAP 三维归因</a:t>
+              <a:t>建立 XGBoost-SHAP × Attention-LSTM 双引擎互补归因 + SHAP 三维归因</a:t>
             </a:r>
           </a:p>
         </p:txBody>
@@ -17891,7 +17891,7 @@
                 <a:cs typeface="Microsoft YaHei"/>
                 <a:ascii typeface="Arial"/>
               </a:rPr>
-              <a:t>双引擎协同验证</a:t>
+              <a:t>双引擎互补归因</a:t>
             </a:r>
           </a:p>
           <a:p>
@@ -20244,7 +20244,7 @@
                 <a:cs typeface="Microsoft YaHei"/>
                 <a:ascii typeface="Arial"/>
               </a:rPr>
-              <a:t>多采用单一模型,缺乏多模型协同验证</a:t>
+              <a:t>多采用单一模型,缺乏多模型互补归因</a:t>
             </a:r>
           </a:p>
         </p:txBody>
@@ -22573,7 +22573,7 @@
                 <a:cs typeface="Microsoft YaHei"/>
                 <a:ascii typeface="Arial"/>
               </a:rPr>
-              <a:t>多模态数据驱动 + 双引擎协同验证 + 可视化系统集成</a:t>
+              <a:t>多模态数据驱动 + 双引擎互补归因 + 可视化系统集成</a:t>
             </a:r>
           </a:p>
         </p:txBody>
@@ -23614,7 +23614,7 @@
                 <a:cs typeface="Microsoft YaHei"/>
                 <a:ascii typeface="Arial"/>
               </a:rPr>
-              <a:t>两个原理完全不同的模型独立建模 → 交叉印证核心因子 → 系统化输出决策建议</a:t>
+              <a:t>两个原理完全不同的模型独立建模 → 双视角互补识别核心因子 → 系统化输出决策建议</a:t>
             </a:r>
           </a:p>
         </p:txBody>
